--- a/curso/pptx/S32.pptx
+++ b/curso/pptx/S32.pptx
@@ -3890,8 +3890,8 @@
         </p:nvSpPr>
         <p:spPr>
           <a:xfrm>
-            <a:off x="640000" y="420000"/>
-            <a:ext cx="10912000" cy="420000"/>
+            <a:off x="10652000" y="380000"/>
+            <a:ext cx="900000" cy="800000"/>
           </a:xfrm>
           <a:prstGeom prst="rect">
             <a:avLst/>
@@ -3906,17 +3906,17 @@
           <a:p>
             <a:pPr>
               <a:spcAft>
-                <a:spcPts val="810"/>
-              </a:spcAft>
-            </a:pPr>
-            <a:r>
-              <a:rPr sz="1800" b="1">
+                <a:spcPts val="1980"/>
+              </a:spcAft>
+            </a:pPr>
+            <a:r>
+              <a:rPr sz="4400" b="0">
                 <a:solidFill>
                   <a:srgbClr val="1F2A44"/>
                 </a:solidFill>
                 <a:latin typeface="Nunito Sans"/>
               </a:rPr>
-              <a:t>🦉 Aula de Filosofía</a:t>
+              <a:t>🙃</a:t>
             </a:r>
           </a:p>
         </p:txBody>

--- a/curso/pptx/S32.pptx
+++ b/curso/pptx/S32.pptx
@@ -471,426 +471,6 @@
     </a:lvl9pPr>
   </p:notesStyle>
 </p:notesMaster>
-</file>
-
-<file path=ppt/notesSlides/notesSlide1.xml><?xml version="1.0" encoding="utf-8"?>
-<p:notes xmlns:a="http://schemas.openxmlformats.org/drawingml/2006/main" xmlns:p="http://schemas.openxmlformats.org/presentationml/2006/main" xmlns:r="http://schemas.openxmlformats.org/officeDocument/2006/relationships">
-  <p:cSld>
-    <p:spTree>
-      <p:nvGrpSpPr>
-        <p:cNvPr id="1" name=""/>
-        <p:cNvGrpSpPr/>
-        <p:nvPr/>
-      </p:nvGrpSpPr>
-      <p:grpSpPr>
-        <a:xfrm>
-          <a:off x="0" y="0"/>
-          <a:ext cx="0" cy="0"/>
-          <a:chOff x="0" y="0"/>
-          <a:chExt cx="0" cy="0"/>
-        </a:xfrm>
-      </p:grpSpPr>
-      <p:sp>
-        <p:nvSpPr>
-          <p:cNvPr id="2" name="Slide Image Placeholder 1"/>
-          <p:cNvSpPr>
-            <a:spLocks noGrp="1"/>
-          </p:cNvSpPr>
-          <p:nvPr>
-            <p:ph type="sldImg" idx="2"/>
-          </p:nvPr>
-        </p:nvSpPr>
-        <p:spPr/>
-      </p:sp>
-      <p:sp>
-        <p:nvSpPr>
-          <p:cNvPr id="3" name="Notes Placeholder 2"/>
-          <p:cNvSpPr>
-            <a:spLocks noGrp="1"/>
-          </p:cNvSpPr>
-          <p:nvPr>
-            <p:ph type="body" idx="3" sz="quarter"/>
-          </p:nvPr>
-        </p:nvSpPr>
-        <p:spPr/>
-        <p:txBody>
-          <a:bodyPr/>
-          <a:lstStyle/>
-          <a:p>
-            <a:r>
-              <a:t>3 minutos. Sin apuntes. Es para recordar, no cuenta para nota.</a:t>
-            </a:r>
-          </a:p>
-        </p:txBody>
-      </p:sp>
-      <p:sp>
-        <p:nvSpPr>
-          <p:cNvPr id="4" name="Slide Number Placeholder 3"/>
-          <p:cNvSpPr>
-            <a:spLocks noGrp="1"/>
-          </p:cNvSpPr>
-          <p:nvPr>
-            <p:ph type="sldNum" idx="5" sz="quarter"/>
-          </p:nvPr>
-        </p:nvSpPr>
-        <p:spPr/>
-      </p:sp>
-    </p:spTree>
-  </p:cSld>
-  <p:clrMapOvr>
-    <a:masterClrMapping/>
-  </p:clrMapOvr>
-</p:notes>
-</file>
-
-<file path=ppt/notesSlides/notesSlide2.xml><?xml version="1.0" encoding="utf-8"?>
-<p:notes xmlns:a="http://schemas.openxmlformats.org/drawingml/2006/main" xmlns:p="http://schemas.openxmlformats.org/presentationml/2006/main" xmlns:r="http://schemas.openxmlformats.org/officeDocument/2006/relationships">
-  <p:cSld>
-    <p:spTree>
-      <p:nvGrpSpPr>
-        <p:cNvPr id="1" name=""/>
-        <p:cNvGrpSpPr/>
-        <p:nvPr/>
-      </p:nvGrpSpPr>
-      <p:grpSpPr>
-        <a:xfrm>
-          <a:off x="0" y="0"/>
-          <a:ext cx="0" cy="0"/>
-          <a:chOff x="0" y="0"/>
-          <a:chExt cx="0" cy="0"/>
-        </a:xfrm>
-      </p:grpSpPr>
-      <p:sp>
-        <p:nvSpPr>
-          <p:cNvPr id="2" name="Slide Image Placeholder 1"/>
-          <p:cNvSpPr>
-            <a:spLocks noGrp="1"/>
-          </p:cNvSpPr>
-          <p:nvPr>
-            <p:ph type="sldImg" idx="2"/>
-          </p:nvPr>
-        </p:nvSpPr>
-        <p:spPr/>
-      </p:sp>
-      <p:sp>
-        <p:nvSpPr>
-          <p:cNvPr id="3" name="Notes Placeholder 2"/>
-          <p:cNvSpPr>
-            <a:spLocks noGrp="1"/>
-          </p:cNvSpPr>
-          <p:nvPr>
-            <p:ph type="body" idx="3" sz="quarter"/>
-          </p:nvPr>
-        </p:nvSpPr>
-        <p:spPr/>
-        <p:txBody>
-          <a:bodyPr/>
-          <a:lstStyle/>
-          <a:p>
-            <a:r>
-              <a:t>3 minutos. Sin apuntes. Es para recordar, no cuenta para nota.</a:t>
-            </a:r>
-          </a:p>
-        </p:txBody>
-      </p:sp>
-      <p:sp>
-        <p:nvSpPr>
-          <p:cNvPr id="4" name="Slide Number Placeholder 3"/>
-          <p:cNvSpPr>
-            <a:spLocks noGrp="1"/>
-          </p:cNvSpPr>
-          <p:nvPr>
-            <p:ph type="sldNum" idx="5" sz="quarter"/>
-          </p:nvPr>
-        </p:nvSpPr>
-        <p:spPr/>
-      </p:sp>
-    </p:spTree>
-  </p:cSld>
-  <p:clrMapOvr>
-    <a:masterClrMapping/>
-  </p:clrMapOvr>
-</p:notes>
-</file>
-
-<file path=ppt/notesSlides/notesSlide3.xml><?xml version="1.0" encoding="utf-8"?>
-<p:notes xmlns:a="http://schemas.openxmlformats.org/drawingml/2006/main" xmlns:p="http://schemas.openxmlformats.org/presentationml/2006/main" xmlns:r="http://schemas.openxmlformats.org/officeDocument/2006/relationships">
-  <p:cSld>
-    <p:spTree>
-      <p:nvGrpSpPr>
-        <p:cNvPr id="1" name=""/>
-        <p:cNvGrpSpPr/>
-        <p:nvPr/>
-      </p:nvGrpSpPr>
-      <p:grpSpPr>
-        <a:xfrm>
-          <a:off x="0" y="0"/>
-          <a:ext cx="0" cy="0"/>
-          <a:chOff x="0" y="0"/>
-          <a:chExt cx="0" cy="0"/>
-        </a:xfrm>
-      </p:grpSpPr>
-      <p:sp>
-        <p:nvSpPr>
-          <p:cNvPr id="2" name="Slide Image Placeholder 1"/>
-          <p:cNvSpPr>
-            <a:spLocks noGrp="1"/>
-          </p:cNvSpPr>
-          <p:nvPr>
-            <p:ph type="sldImg" idx="2"/>
-          </p:nvPr>
-        </p:nvSpPr>
-        <p:spPr/>
-      </p:sp>
-      <p:sp>
-        <p:nvSpPr>
-          <p:cNvPr id="3" name="Notes Placeholder 2"/>
-          <p:cNvSpPr>
-            <a:spLocks noGrp="1"/>
-          </p:cNvSpPr>
-          <p:nvPr>
-            <p:ph type="body" idx="3" sz="quarter"/>
-          </p:nvPr>
-        </p:nvSpPr>
-        <p:spPr/>
-        <p:txBody>
-          <a:bodyPr/>
-          <a:lstStyle/>
-          <a:p>
-            <a:r>
-              <a:t>Nadie tiene que contestar: solo pensarlo.</a:t>
-            </a:r>
-          </a:p>
-        </p:txBody>
-      </p:sp>
-      <p:sp>
-        <p:nvSpPr>
-          <p:cNvPr id="4" name="Slide Number Placeholder 3"/>
-          <p:cNvSpPr>
-            <a:spLocks noGrp="1"/>
-          </p:cNvSpPr>
-          <p:nvPr>
-            <p:ph type="sldNum" idx="5" sz="quarter"/>
-          </p:nvPr>
-        </p:nvSpPr>
-        <p:spPr/>
-      </p:sp>
-    </p:spTree>
-  </p:cSld>
-  <p:clrMapOvr>
-    <a:masterClrMapping/>
-  </p:clrMapOvr>
-</p:notes>
-</file>
-
-<file path=ppt/notesSlides/notesSlide4.xml><?xml version="1.0" encoding="utf-8"?>
-<p:notes xmlns:a="http://schemas.openxmlformats.org/drawingml/2006/main" xmlns:p="http://schemas.openxmlformats.org/presentationml/2006/main" xmlns:r="http://schemas.openxmlformats.org/officeDocument/2006/relationships">
-  <p:cSld>
-    <p:spTree>
-      <p:nvGrpSpPr>
-        <p:cNvPr id="1" name=""/>
-        <p:cNvGrpSpPr/>
-        <p:nvPr/>
-      </p:nvGrpSpPr>
-      <p:grpSpPr>
-        <a:xfrm>
-          <a:off x="0" y="0"/>
-          <a:ext cx="0" cy="0"/>
-          <a:chOff x="0" y="0"/>
-          <a:chExt cx="0" cy="0"/>
-        </a:xfrm>
-      </p:grpSpPr>
-      <p:sp>
-        <p:nvSpPr>
-          <p:cNvPr id="2" name="Slide Image Placeholder 1"/>
-          <p:cNvSpPr>
-            <a:spLocks noGrp="1"/>
-          </p:cNvSpPr>
-          <p:nvPr>
-            <p:ph type="sldImg" idx="2"/>
-          </p:nvPr>
-        </p:nvSpPr>
-        <p:spPr/>
-      </p:sp>
-      <p:sp>
-        <p:nvSpPr>
-          <p:cNvPr id="3" name="Notes Placeholder 2"/>
-          <p:cNvSpPr>
-            <a:spLocks noGrp="1"/>
-          </p:cNvSpPr>
-          <p:nvPr>
-            <p:ph type="body" idx="3" sz="quarter"/>
-          </p:nvPr>
-        </p:nvSpPr>
-        <p:spPr/>
-        <p:txBody>
-          <a:bodyPr/>
-          <a:lstStyle/>
-          <a:p>
-            <a:r>
-              <a:t>Dejar unos segundos para que piensen la respuesta fácil antes de enseñar los pasos.</a:t>
-            </a:r>
-          </a:p>
-        </p:txBody>
-      </p:sp>
-      <p:sp>
-        <p:nvSpPr>
-          <p:cNvPr id="4" name="Slide Number Placeholder 3"/>
-          <p:cNvSpPr>
-            <a:spLocks noGrp="1"/>
-          </p:cNvSpPr>
-          <p:nvPr>
-            <p:ph type="sldNum" idx="5" sz="quarter"/>
-          </p:nvPr>
-        </p:nvSpPr>
-        <p:spPr/>
-      </p:sp>
-    </p:spTree>
-  </p:cSld>
-  <p:clrMapOvr>
-    <a:masterClrMapping/>
-  </p:clrMapOvr>
-</p:notes>
-</file>
-
-<file path=ppt/notesSlides/notesSlide5.xml><?xml version="1.0" encoding="utf-8"?>
-<p:notes xmlns:a="http://schemas.openxmlformats.org/drawingml/2006/main" xmlns:p="http://schemas.openxmlformats.org/presentationml/2006/main" xmlns:r="http://schemas.openxmlformats.org/officeDocument/2006/relationships">
-  <p:cSld>
-    <p:spTree>
-      <p:nvGrpSpPr>
-        <p:cNvPr id="1" name=""/>
-        <p:cNvGrpSpPr/>
-        <p:nvPr/>
-      </p:nvGrpSpPr>
-      <p:grpSpPr>
-        <a:xfrm>
-          <a:off x="0" y="0"/>
-          <a:ext cx="0" cy="0"/>
-          <a:chOff x="0" y="0"/>
-          <a:chExt cx="0" cy="0"/>
-        </a:xfrm>
-      </p:grpSpPr>
-      <p:sp>
-        <p:nvSpPr>
-          <p:cNvPr id="2" name="Slide Image Placeholder 1"/>
-          <p:cNvSpPr>
-            <a:spLocks noGrp="1"/>
-          </p:cNvSpPr>
-          <p:nvPr>
-            <p:ph type="sldImg" idx="2"/>
-          </p:nvPr>
-        </p:nvSpPr>
-        <p:spPr/>
-      </p:sp>
-      <p:sp>
-        <p:nvSpPr>
-          <p:cNvPr id="3" name="Notes Placeholder 2"/>
-          <p:cNvSpPr>
-            <a:spLocks noGrp="1"/>
-          </p:cNvSpPr>
-          <p:nvPr>
-            <p:ph type="body" idx="3" sz="quarter"/>
-          </p:nvPr>
-        </p:nvSpPr>
-        <p:spPr/>
-        <p:txBody>
-          <a:bodyPr/>
-          <a:lstStyle/>
-          <a:p>
-            <a:r>
-              <a:t>Dejar 2 minutos para que lo escriban. La diapositiva siguiente muestra el resumen.</a:t>
-            </a:r>
-          </a:p>
-        </p:txBody>
-      </p:sp>
-      <p:sp>
-        <p:nvSpPr>
-          <p:cNvPr id="4" name="Slide Number Placeholder 3"/>
-          <p:cNvSpPr>
-            <a:spLocks noGrp="1"/>
-          </p:cNvSpPr>
-          <p:nvPr>
-            <p:ph type="sldNum" idx="5" sz="quarter"/>
-          </p:nvPr>
-        </p:nvSpPr>
-        <p:spPr/>
-      </p:sp>
-    </p:spTree>
-  </p:cSld>
-  <p:clrMapOvr>
-    <a:masterClrMapping/>
-  </p:clrMapOvr>
-</p:notes>
-</file>
-
-<file path=ppt/notesSlides/notesSlide6.xml><?xml version="1.0" encoding="utf-8"?>
-<p:notes xmlns:a="http://schemas.openxmlformats.org/drawingml/2006/main" xmlns:p="http://schemas.openxmlformats.org/presentationml/2006/main" xmlns:r="http://schemas.openxmlformats.org/officeDocument/2006/relationships">
-  <p:cSld>
-    <p:spTree>
-      <p:nvGrpSpPr>
-        <p:cNvPr id="1" name=""/>
-        <p:cNvGrpSpPr/>
-        <p:nvPr/>
-      </p:nvGrpSpPr>
-      <p:grpSpPr>
-        <a:xfrm>
-          <a:off x="0" y="0"/>
-          <a:ext cx="0" cy="0"/>
-          <a:chOff x="0" y="0"/>
-          <a:chExt cx="0" cy="0"/>
-        </a:xfrm>
-      </p:grpSpPr>
-      <p:sp>
-        <p:nvSpPr>
-          <p:cNvPr id="2" name="Slide Image Placeholder 1"/>
-          <p:cNvSpPr>
-            <a:spLocks noGrp="1"/>
-          </p:cNvSpPr>
-          <p:nvPr>
-            <p:ph type="sldImg" idx="2"/>
-          </p:nvPr>
-        </p:nvSpPr>
-        <p:spPr/>
-      </p:sp>
-      <p:sp>
-        <p:nvSpPr>
-          <p:cNvPr id="3" name="Notes Placeholder 2"/>
-          <p:cNvSpPr>
-            <a:spLocks noGrp="1"/>
-          </p:cNvSpPr>
-          <p:nvPr>
-            <p:ph type="body" idx="3" sz="quarter"/>
-          </p:nvPr>
-        </p:nvSpPr>
-        <p:spPr/>
-        <p:txBody>
-          <a:bodyPr/>
-          <a:lstStyle/>
-          <a:p>
-            <a:r>
-              <a:t>Buscar: «qué es el clickbait» · «titulares engañosos ejemplos»</a:t>
-            </a:r>
-          </a:p>
-        </p:txBody>
-      </p:sp>
-      <p:sp>
-        <p:nvSpPr>
-          <p:cNvPr id="4" name="Slide Number Placeholder 3"/>
-          <p:cNvSpPr>
-            <a:spLocks noGrp="1"/>
-          </p:cNvSpPr>
-          <p:nvPr>
-            <p:ph type="sldNum" idx="5" sz="quarter"/>
-          </p:nvPr>
-        </p:nvSpPr>
-        <p:spPr/>
-      </p:sp>
-    </p:spTree>
-  </p:cSld>
-  <p:clrMapOvr>
-    <a:masterClrMapping/>
-  </p:clrMapOvr>
-</p:notes>
 </file>
 
 <file path=ppt/slideLayouts/slideLayout1.xml><?xml version="1.0" encoding="utf-8"?>

--- a/curso/pptx/S32.pptx
+++ b/curso/pptx/S32.pptx
@@ -3574,7 +3574,7 @@
                 </a:solidFill>
                 <a:latin typeface="Fredoka"/>
               </a:rPr>
-              <a:t>Titulares y clickbait</a:t>
+              <a:t>¿Qué es una fuente fiable?</a:t>
             </a:r>
           </a:p>
         </p:txBody>
@@ -3613,7 +3613,7 @@
                 </a:solidFill>
                 <a:latin typeface="Nunito Sans"/>
               </a:rPr>
-              <a:t>Un titular clickbait promete más de lo que cuenta la noticia para que hagas clic; por eso hay que leer la noticia entera.</a:t>
+              <a:t>Ninguna fuente es fiable para todo: miramos quién lo dice, cómo lo sabe, qué gana y cómo ha acertado antes.</a:t>
             </a:r>
           </a:p>
         </p:txBody>
@@ -3717,7 +3717,7 @@
                 </a:solidFill>
                 <a:latin typeface="Fredoka"/>
               </a:rPr>
-              <a:t>Caso 1 · El chocolate</a:t>
+              <a:t>Caso 1 · El metro</a:t>
             </a:r>
           </a:p>
         </p:txBody>
@@ -3799,7 +3799,7 @@
                 </a:solidFill>
                 <a:latin typeface="Nunito Sans"/>
               </a:rPr>
-              <a:t>Titular: «Un estudio demuestra que el chocolate hace adelgazar». La noticia: 16 personas, dos semanas, y lo pagó una empresa de chocolate (ejemplo inventado).</a:t>
+              <a:t>Tres mensajes dicen que mañana cierra el metro: uno de un amigo, otro de una cuenta sin nombre y otro de la web oficial del metro.</a:t>
             </a:r>
           </a:p>
         </p:txBody>
@@ -3847,7 +3847,7 @@
                 </a:solidFill>
                 <a:latin typeface="Nunito Sans"/>
               </a:rPr>
-              <a:t>¿Qué promete el titular? Que está «demostrado» y que adelgazas.</a:t>
+              <a:t>El amigo: es de segunda mano. ¿Dónde lo leyó?</a:t>
             </a:r>
           </a:p>
           <a:p>
@@ -3872,7 +3872,7 @@
                 </a:solidFill>
                 <a:latin typeface="Nunito Sans"/>
               </a:rPr>
-              <a:t>¿Qué dice la noticia? Muy pocas personas, muy poco tiempo, y alguien con interés pagó el estudio.</a:t>
+              <a:t>La cuenta sin nombre: no sé quién es ni cómo lo sabe.</a:t>
             </a:r>
           </a:p>
           <a:p>
@@ -3897,7 +3897,7 @@
                 </a:solidFill>
                 <a:latin typeface="Nunito Sans"/>
               </a:rPr>
-              <a:t>La distancia entre titular y noticia es enorme.</a:t>
+              <a:t>La web oficial: es la fuente original, porque el metro es quien decide si cierra.</a:t>
             </a:r>
           </a:p>
           <a:p>
@@ -3922,7 +3922,7 @@
                 </a:solidFill>
                 <a:latin typeface="Nunito Sans"/>
               </a:rPr>
-              <a:t>Conclusión: titular engañoso. Con tan pocos datos, la noticia no demuestra nada.</a:t>
+              <a:t>Conclusión: hago caso a la web oficial. Si no dice nada, espero antes de creérmelo.</a:t>
             </a:r>
           </a:p>
         </p:txBody>
@@ -4026,7 +4026,7 @@
                 </a:solidFill>
                 <a:latin typeface="Fredoka"/>
               </a:rPr>
-              <a:t>Caso 2 · La pregunta</a:t>
+              <a:t>Caso 2 · La ola de calor</a:t>
             </a:r>
           </a:p>
         </p:txBody>
@@ -4108,7 +4108,7 @@
                 </a:solidFill>
                 <a:latin typeface="Nunito Sans"/>
               </a:rPr>
-              <a:t>Titular: «¿Prohibirán los móviles en todos los institutos el mes que viene?». La noticia: un político lo ha propuesto y nadie lo ha aprobado.</a:t>
+              <a:t>Una chica busca información sobre una ola de calor. Encuentra un blog sin autor y una noticia de un periódico con datos de la Agencia Estatal de Meteorología.</a:t>
             </a:r>
           </a:p>
         </p:txBody>
@@ -4156,7 +4156,7 @@
                 </a:solidFill>
                 <a:latin typeface="Nunito Sans"/>
               </a:rPr>
-              <a:t>El titular hace una pregunta que da miedo o curiosidad.</a:t>
+              <a:t>¿Quién lo dice? El blog, no lo sé. El periódico tiene nombre y periodista.</a:t>
             </a:r>
           </a:p>
           <a:p>
@@ -4181,7 +4181,7 @@
                 </a:solidFill>
                 <a:latin typeface="Nunito Sans"/>
               </a:rPr>
-              <a:t>La noticia contesta, en el fondo, que no: solo es una propuesta.</a:t>
+              <a:t>¿Cómo lo sabe? El periódico cita a la Agencia de Meteorología, que mide las temperaturas.</a:t>
             </a:r>
           </a:p>
           <a:p>
@@ -4206,7 +4206,7 @@
                 </a:solidFill>
                 <a:latin typeface="Nunito Sans"/>
               </a:rPr>
-              <a:t>Quien lee solo el titular puede creer que ya está decidido.</a:t>
+              <a:t>Mejor aún: puedo ir a la web de la Agencia, la fuente original.</a:t>
             </a:r>
           </a:p>
           <a:p>
@@ -4231,7 +4231,7 @@
                 </a:solidFill>
                 <a:latin typeface="Nunito Sans"/>
               </a:rPr>
-              <a:t>Conclusión: clickbait con pregunta. La respuesta real es «no, de momento».</a:t>
+              <a:t>Conclusión: para este dato, el periódico es mejor fuente que el blog, y la Agencia mejor que los dos.</a:t>
             </a:r>
           </a:p>
         </p:txBody>
@@ -4335,7 +4335,7 @@
                 </a:solidFill>
                 <a:latin typeface="Fredoka"/>
               </a:rPr>
-              <a:t>Caso 3 · Un titular honesto</a:t>
+              <a:t>Caso 3 · La web de la marca</a:t>
             </a:r>
           </a:p>
         </p:txBody>
@@ -4417,7 +4417,7 @@
                 </a:solidFill>
                 <a:latin typeface="Nunito Sans"/>
               </a:rPr>
-              <a:t>Titular: «Las bibliotecas de Bilbao abrirán hasta las diez en época de exámenes». La noticia da fechas y horarios (ejemplo inventado).</a:t>
+              <a:t>Una web dice que una bebida energética «mejora las notas». La web es de la marca que la vende.</a:t>
             </a:r>
           </a:p>
         </p:txBody>
@@ -4465,7 +4465,7 @@
                 </a:solidFill>
                 <a:latin typeface="Nunito Sans"/>
               </a:rPr>
-              <a:t>¿Esconde algo? No: el dato está en el titular.</a:t>
+              <a:t>¿Quién lo dice? La propia marca.</a:t>
             </a:r>
           </a:p>
           <a:p>
@@ -4490,7 +4490,7 @@
                 </a:solidFill>
                 <a:latin typeface="Nunito Sans"/>
               </a:rPr>
-              <a:t>¿Exagera? No: no hay palabras como «increíble».</a:t>
+              <a:t>¿Cómo lo sabe? No cita ningún estudio.</a:t>
             </a:r>
           </a:p>
           <a:p>
@@ -4515,7 +4515,7 @@
                 </a:solidFill>
                 <a:latin typeface="Nunito Sans"/>
               </a:rPr>
-              <a:t>¿Coincide con la noticia? Sí: la noticia lo amplía con detalles.</a:t>
+              <a:t>¿Qué gana? Vender más: tiene un interés claro.</a:t>
             </a:r>
           </a:p>
           <a:p>
@@ -4540,7 +4540,7 @@
                 </a:solidFill>
                 <a:latin typeface="Nunito Sans"/>
               </a:rPr>
-              <a:t>Conclusión: no todo titular es clickbait. Este resume bien la noticia.</a:t>
+              <a:t>Conclusión: para este tema, no es una fuente fiable. Busco qué dicen médicos o nutricionistas que no la vendan.</a:t>
             </a:r>
           </a:p>
         </p:txBody>
@@ -4644,7 +4644,7 @@
                 </a:solidFill>
                 <a:latin typeface="Fredoka"/>
               </a:rPr>
-              <a:t>⚠ La remontada</a:t>
+              <a:t>⚠ El periódico que se equivocó</a:t>
             </a:r>
           </a:p>
         </p:txBody>
@@ -4726,7 +4726,7 @@
                 </a:solidFill>
                 <a:latin typeface="Nunito Sans"/>
               </a:rPr>
-              <a:t>Titular: «Increíble remontada: el Athletic gana 3-2 tras ir perdiendo 0-2 en el minuto 80». (Ejemplo inventado.)</a:t>
+              <a:t>Un periódico serio publica que un jugador del Athletic ficha por otro equipo. Al día siguiente escribe: «Nos equivocamos: no es verdad». (Ejemplo inventado.)</a:t>
             </a:r>
           </a:p>
         </p:txBody>
@@ -4774,7 +4774,7 @@
                 </a:solidFill>
                 <a:latin typeface="Nunito Sans"/>
               </a:rPr>
-              <a:t>Dice «increíble». ¿Es clickbait?</a:t>
+              <a:t>Se ha equivocado. ¿Entonces ya no es una fuente fiable?</a:t>
             </a:r>
           </a:p>
           <a:p>
@@ -4799,7 +4799,7 @@
                 </a:solidFill>
                 <a:latin typeface="Nunito Sans"/>
               </a:rPr>
-              <a:t>Tiene una palabra de la lista: «increíble».</a:t>
+              <a:t>Todos los medios se equivocan alguna vez, también los mejores.</a:t>
             </a:r>
           </a:p>
           <a:p>
@@ -4824,7 +4824,7 @@
                 </a:solidFill>
                 <a:latin typeface="Nunito Sans"/>
               </a:rPr>
-              <a:t>Pero ¿esconde el dato? No: da el resultado y cómo pasó.</a:t>
+              <a:t>Este ha corregido rápido y en público: eso es una señal a favor.</a:t>
             </a:r>
           </a:p>
           <a:p>
@@ -4849,7 +4849,7 @@
                 </a:solidFill>
                 <a:latin typeface="Nunito Sans"/>
               </a:rPr>
-              <a:t>¿Exagera? Remontar dos goles en diez minutos es raro de verdad.</a:t>
+              <a:t>Una cuenta que nunca corrige nada no es mejor: solo esconde sus errores.</a:t>
             </a:r>
           </a:p>
           <a:p>
@@ -4874,7 +4874,25 @@
                 </a:solidFill>
                 <a:latin typeface="Nunito Sans"/>
               </a:rPr>
-              <a:t>Conclusión: una palabra llamativa no basta. Clickbait es prometer más de lo que la noticia da.</a:t>
+              <a:t>Conclusión: fiable no es </a:t>
+            </a:r>
+            <a:r>
+              <a:rPr sz="2400" b="1">
+                <a:solidFill>
+                  <a:srgbClr val="1F2A44"/>
+                </a:solidFill>
+                <a:latin typeface="Nunito Sans"/>
+              </a:rPr>
+              <a:t>infalible</a:t>
+            </a:r>
+            <a:r>
+              <a:rPr sz="2400" b="0">
+                <a:solidFill>
+                  <a:srgbClr val="1F2A44"/>
+                </a:solidFill>
+                <a:latin typeface="Nunito Sans"/>
+              </a:rPr>
+              <a:t> (que nunca falla). Es quien suele acertar y corrige cuando falla.</a:t>
             </a:r>
           </a:p>
         </p:txBody>
@@ -5130,7 +5148,7 @@
                 </a:solidFill>
                 <a:latin typeface="Nunito Sans"/>
               </a:rPr>
-              <a:t>El titular resume la noticia, pero mucha gente solo lee el titular.</a:t>
+              <a:t>Una fuente es de donde sale una información; la original suele valer más.</a:t>
             </a:r>
           </a:p>
           <a:p>
@@ -5155,7 +5173,7 @@
                 </a:solidFill>
                 <a:latin typeface="Nunito Sans"/>
               </a:rPr>
-              <a:t>El clickbait exagera o esconde información para que hagas clic.</a:t>
+              <a:t>Pregunta siempre: ¿quién lo dice?, ¿cómo lo sabe?, ¿qué gana?</a:t>
             </a:r>
           </a:p>
           <a:p>
@@ -5180,7 +5198,7 @@
                 </a:solidFill>
                 <a:latin typeface="Nunito Sans"/>
               </a:rPr>
-              <a:t>Un titular llamativo no siempre es clickbait: compara lo que promete con la noticia entera.</a:t>
+              <a:t>Fiable no es infalible: es quien suele acertar y corrige sus errores.</a:t>
             </a:r>
           </a:p>
         </p:txBody>
@@ -5284,7 +5302,7 @@
                 </a:solidFill>
                 <a:latin typeface="Fredoka"/>
               </a:rPr>
-              <a:t>Qué es el clickbait y cómo reconocerlo</a:t>
+              <a:t>Cómo saber si una fuente de información es fiable</a:t>
             </a:r>
           </a:p>
         </p:txBody>
@@ -5323,7 +5341,7 @@
                 </a:solidFill>
                 <a:latin typeface="Nunito Sans"/>
               </a:rPr>
-              <a:t>Que vean titulares reales y comparen lo que prometen con lo que cuenta la noticia.</a:t>
+              <a:t>Que oigan las mismas preguntas (quién, cómo lo sabe, qué gana) con otros ejemplos.</a:t>
             </a:r>
           </a:p>
         </p:txBody>
@@ -5981,7 +5999,7 @@
                 </a:solidFill>
                 <a:latin typeface="Nunito Sans"/>
               </a:rPr>
-              <a:t>Una señal a favor de una fuente: ______ a sus fuentes y corrige sus errores.  (sesión 31)</a:t>
+              <a:t>Sentirse seguro es un ______, no una razón.  (sesión 31)</a:t>
             </a:r>
           </a:p>
           <a:p>
@@ -6006,7 +6024,7 @@
                 </a:solidFill>
                 <a:latin typeface="Nunito Sans"/>
               </a:rPr>
-              <a:t>Una ______ es de donde sale una información.  (sesión 31)</a:t>
+              <a:t>El caso del reloj parado muestra que la definición de saber no es ______.  (sesión 31)</a:t>
             </a:r>
           </a:p>
           <a:p>
@@ -6031,7 +6049,7 @@
                 </a:solidFill>
                 <a:latin typeface="Nunito Sans"/>
               </a:rPr>
-              <a:t>La ______ blanca da aspecto de ciencia, pero la ropa no es una razón.  (sesión 27)</a:t>
+              <a:t>Pregunta que desmonta la pendiente resbaladiza: ¿por qué un ______ lleva seguro al siguiente?  (sesión 27)</a:t>
             </a:r>
           </a:p>
         </p:txBody>
@@ -6183,7 +6201,7 @@
                 </a:solidFill>
                 <a:latin typeface="Nunito Sans"/>
               </a:rPr>
-              <a:t>Una señal a favor de una fuente: </a:t>
+              <a:t>Sentirse seguro es un </a:t>
             </a:r>
             <a:r>
               <a:rPr sz="2600" b="1">
@@ -6192,7 +6210,7 @@
                 </a:solidFill>
                 <a:latin typeface="Nunito Sans"/>
               </a:rPr>
-              <a:t>enlaza</a:t>
+              <a:t>sentimiento</a:t>
             </a:r>
             <a:r>
               <a:rPr sz="2600" b="0">
@@ -6201,7 +6219,7 @@
                 </a:solidFill>
                 <a:latin typeface="Nunito Sans"/>
               </a:rPr>
-              <a:t> a sus fuentes y corrige sus errores.  (sesión 31)</a:t>
+              <a:t>, no una razón.  (sesión 31)</a:t>
             </a:r>
           </a:p>
           <a:p>
@@ -6226,7 +6244,7 @@
                 </a:solidFill>
                 <a:latin typeface="Nunito Sans"/>
               </a:rPr>
-              <a:t>Una </a:t>
+              <a:t>El caso del reloj parado muestra que la definición de saber no es </a:t>
             </a:r>
             <a:r>
               <a:rPr sz="2600" b="1">
@@ -6235,7 +6253,7 @@
                 </a:solidFill>
                 <a:latin typeface="Nunito Sans"/>
               </a:rPr>
-              <a:t>fuente</a:t>
+              <a:t>perfecta</a:t>
             </a:r>
             <a:r>
               <a:rPr sz="2600" b="0">
@@ -6244,7 +6262,7 @@
                 </a:solidFill>
                 <a:latin typeface="Nunito Sans"/>
               </a:rPr>
-              <a:t> es de donde sale una información.  (sesión 31)</a:t>
+              <a:t>.  (sesión 31)</a:t>
             </a:r>
           </a:p>
           <a:p>
@@ -6269,7 +6287,7 @@
                 </a:solidFill>
                 <a:latin typeface="Nunito Sans"/>
               </a:rPr>
-              <a:t>La </a:t>
+              <a:t>Pregunta que desmonta la pendiente resbaladiza: ¿por qué un </a:t>
             </a:r>
             <a:r>
               <a:rPr sz="2600" b="1">
@@ -6278,7 +6296,7 @@
                 </a:solidFill>
                 <a:latin typeface="Nunito Sans"/>
               </a:rPr>
-              <a:t>bata</a:t>
+              <a:t>paso</a:t>
             </a:r>
             <a:r>
               <a:rPr sz="2600" b="0">
@@ -6287,7 +6305,7 @@
                 </a:solidFill>
                 <a:latin typeface="Nunito Sans"/>
               </a:rPr>
-              <a:t> blanca da aspecto de ciencia, pero la ropa no es una razón.  (sesión 27)</a:t>
+              <a:t> lleva seguro al siguiente?  (sesión 27)</a:t>
             </a:r>
           </a:p>
         </p:txBody>
@@ -6434,7 +6452,7 @@
                 </a:solidFill>
                 <a:latin typeface="Nunito Sans"/>
               </a:rPr>
-              <a:t>«No vas a creer lo que han encontrado en un instituto de Bilbao. El final te dejará sin palabras.»</a:t>
+              <a:t>Tres mensajes dicen que mañana cierra el metro: uno de un amigo, otro de una cuenta sin nombre y otro de la web oficial del metro.</a:t>
             </a:r>
           </a:p>
         </p:txBody>
@@ -6473,7 +6491,7 @@
                 </a:solidFill>
                 <a:latin typeface="Nunito Sans"/>
               </a:rPr>
-              <a:t>¿Qué sabes de verdad después de leer esa frase?</a:t>
+              <a:t>¿A cuál harías más caso? ¿Por qué?</a:t>
             </a:r>
           </a:p>
         </p:txBody>
@@ -6577,7 +6595,7 @@
                 </a:solidFill>
                 <a:latin typeface="Fredoka"/>
               </a:rPr>
-              <a:t>Titulares y clickbait</a:t>
+              <a:t>Qué es una fuente</a:t>
             </a:r>
           </a:p>
         </p:txBody>
@@ -6642,7 +6660,7 @@
                 </a:solidFill>
                 <a:latin typeface="Nunito Sans"/>
               </a:rPr>
-              <a:t>BLOQUE 1 · TITULARES Y CLICKBAIT</a:t>
+              <a:t>BLOQUE 1 · QUÉ ES UNA FUENTE</a:t>
             </a:r>
           </a:p>
         </p:txBody>
@@ -6681,7 +6699,7 @@
                 </a:solidFill>
                 <a:latin typeface="Fredoka"/>
               </a:rPr>
-              <a:t>Titular</a:t>
+              <a:t>Fuente</a:t>
             </a:r>
           </a:p>
         </p:txBody>
@@ -6763,7 +6781,7 @@
                 </a:solidFill>
                 <a:latin typeface="Nunito Sans"/>
               </a:rPr>
-              <a:t>El titular es la frase grande que resume una noticia.</a:t>
+              <a:t>Una fuente es de donde sale una información: una persona, un medio, una web, un libro.</a:t>
             </a:r>
           </a:p>
         </p:txBody>
@@ -6805,22 +6823,47 @@
               <a:t>• </a:t>
             </a:r>
             <a:r>
+              <a:rPr sz="2800" b="1">
+                <a:solidFill>
+                  <a:srgbClr val="1F2A44"/>
+                </a:solidFill>
+                <a:latin typeface="Nunito Sans"/>
+              </a:rPr>
+              <a:t>Fuente original:</a:t>
+            </a:r>
+            <a:r>
               <a:rPr sz="2800" b="0">
                 <a:solidFill>
                   <a:srgbClr val="1F2A44"/>
                 </a:solidFill>
                 <a:latin typeface="Nunito Sans"/>
               </a:rPr>
-              <a:t>Debe resumir lo </a:t>
-            </a:r>
+              <a:t> quien lo vio, lo midió o lo decidió</a:t>
+            </a:r>
+          </a:p>
+          <a:p>
+            <a:pPr>
+              <a:spcAft>
+                <a:spcPts val="1260"/>
+              </a:spcAft>
+            </a:pPr>
             <a:r>
               <a:rPr sz="2800" b="1">
                 <a:solidFill>
+                  <a:srgbClr val="E8793A"/>
+                </a:solidFill>
+                <a:latin typeface="Nunito Sans"/>
+              </a:rPr>
+              <a:t>• </a:t>
+            </a:r>
+            <a:r>
+              <a:rPr sz="2800" b="1">
+                <a:solidFill>
                   <a:srgbClr val="1F2A44"/>
                 </a:solidFill>
                 <a:latin typeface="Nunito Sans"/>
               </a:rPr>
-              <a:t>importante</a:t>
+              <a:t>De segunda mano:</a:t>
             </a:r>
             <a:r>
               <a:rPr sz="2800" b="0">
@@ -6829,7 +6872,7 @@
                 </a:solidFill>
                 <a:latin typeface="Nunito Sans"/>
               </a:rPr>
-              <a:t> de la noticia</a:t>
+              <a:t> quien lo cuenta después</a:t>
             </a:r>
           </a:p>
           <a:p>
@@ -6854,32 +6897,7 @@
                 </a:solidFill>
                 <a:latin typeface="Nunito Sans"/>
               </a:rPr>
-              <a:t>Mucha gente solo lee el titular, no la noticia entera</a:t>
-            </a:r>
-          </a:p>
-          <a:p>
-            <a:pPr>
-              <a:spcAft>
-                <a:spcPts val="1260"/>
-              </a:spcAft>
-            </a:pPr>
-            <a:r>
-              <a:rPr sz="2800" b="1">
-                <a:solidFill>
-                  <a:srgbClr val="E8793A"/>
-                </a:solidFill>
-                <a:latin typeface="Nunito Sans"/>
-              </a:rPr>
-              <a:t>• </a:t>
-            </a:r>
-            <a:r>
-              <a:rPr sz="2800" b="0">
-                <a:solidFill>
-                  <a:srgbClr val="1F2A44"/>
-                </a:solidFill>
-                <a:latin typeface="Nunito Sans"/>
-              </a:rPr>
-              <a:t>Por eso un titular puede engañar sin mentir del todo</a:t>
+              <a:t>Cuanto más lejos del original, más fácil que cambie</a:t>
             </a:r>
           </a:p>
         </p:txBody>
@@ -6944,7 +6962,7 @@
                 </a:solidFill>
                 <a:latin typeface="Nunito Sans"/>
               </a:rPr>
-              <a:t>BLOQUE 1 · TITULARES Y CLICKBAIT</a:t>
+              <a:t>BLOQUE 1 · QUÉ ES UNA FUENTE</a:t>
             </a:r>
           </a:p>
         </p:txBody>
@@ -6983,191 +7001,221 @@
                 </a:solidFill>
                 <a:latin typeface="Fredoka"/>
               </a:rPr>
-              <a:t>Clickbait («cebo de clics»)</a:t>
-            </a:r>
-          </a:p>
-        </p:txBody>
-      </p:sp>
-      <p:sp>
-        <p:nvSpPr>
-          <p:cNvPr id="4" name="Rectangle 3"/>
-          <p:cNvSpPr/>
+              <a:t>Tres preguntas a una fuente</a:t>
+            </a:r>
+          </a:p>
+        </p:txBody>
+      </p:sp>
+      <p:graphicFrame>
+        <p:nvGraphicFramePr>
+          <p:cNvPr id="4" name="Table 3"/>
+          <p:cNvGraphicFramePr>
+            <a:graphicFrameLocks noGrp="1"/>
+          </p:cNvGraphicFramePr>
           <p:nvPr/>
-        </p:nvSpPr>
-        <p:spPr>
-          <a:xfrm>
-            <a:off x="640000" y="1650000"/>
-            <a:ext cx="10912000" cy="1150000"/>
-          </a:xfrm>
-          <a:prstGeom prst="rect">
-            <a:avLst/>
-          </a:prstGeom>
-          <a:solidFill>
-            <a:srgbClr val="EAF0F7"/>
-          </a:solidFill>
-          <a:ln>
-            <a:noFill/>
-          </a:ln>
-        </p:spPr>
-        <p:style>
-          <a:lnRef idx="1">
-            <a:schemeClr val="accent1"/>
-          </a:lnRef>
-          <a:fillRef idx="3">
-            <a:schemeClr val="accent1"/>
-          </a:fillRef>
-          <a:effectRef idx="2">
-            <a:schemeClr val="accent1"/>
-          </a:effectRef>
-          <a:fontRef idx="minor">
-            <a:schemeClr val="lt1"/>
-          </a:fontRef>
-        </p:style>
-        <p:txBody>
-          <a:bodyPr rtlCol="0" anchor="ctr"/>
-          <a:lstStyle/>
-          <a:p>
-            <a:pPr algn="ctr"/>
-          </a:p>
-        </p:txBody>
-      </p:sp>
-      <p:sp>
-        <p:nvSpPr>
-          <p:cNvPr id="5" name="TextBox 4"/>
-          <p:cNvSpPr txBox="1"/>
-          <p:nvPr/>
-        </p:nvSpPr>
-        <p:spPr>
-          <a:xfrm>
-            <a:off x="840000" y="1730000"/>
-            <a:ext cx="10512000" cy="1000000"/>
-          </a:xfrm>
-          <a:prstGeom prst="rect">
-            <a:avLst/>
-          </a:prstGeom>
-          <a:noFill/>
-        </p:spPr>
-        <p:txBody>
-          <a:bodyPr wrap="square" anchor="ctr">
-            <a:spAutoFit/>
-          </a:bodyPr>
-          <a:lstStyle/>
-          <a:p>
-            <a:pPr>
-              <a:spcAft>
-                <a:spcPts val="1260"/>
-              </a:spcAft>
-            </a:pPr>
-            <a:r>
-              <a:rPr sz="2800" b="1">
-                <a:solidFill>
-                  <a:srgbClr val="1F2A44"/>
-                </a:solidFill>
-                <a:latin typeface="Nunito Sans"/>
-              </a:rPr>
-              <a:t>Un titular que exagera o esconde información para que hagas clic.</a:t>
-            </a:r>
-          </a:p>
-        </p:txBody>
-      </p:sp>
-      <p:sp>
-        <p:nvSpPr>
-          <p:cNvPr id="6" name="TextBox 5"/>
-          <p:cNvSpPr txBox="1"/>
-          <p:nvPr/>
-        </p:nvSpPr>
-        <p:spPr>
-          <a:xfrm>
-            <a:off x="640000" y="3000000"/>
-            <a:ext cx="10912000" cy="3458000"/>
-          </a:xfrm>
-          <a:prstGeom prst="rect">
-            <a:avLst/>
-          </a:prstGeom>
-          <a:noFill/>
-        </p:spPr>
-        <p:txBody>
-          <a:bodyPr wrap="square">
-            <a:spAutoFit/>
-          </a:bodyPr>
-          <a:lstStyle/>
-          <a:p>
-            <a:pPr>
-              <a:spcAft>
-                <a:spcPts val="1260"/>
-              </a:spcAft>
-            </a:pPr>
-            <a:r>
-              <a:rPr sz="2800" b="1">
-                <a:solidFill>
-                  <a:srgbClr val="E8793A"/>
-                </a:solidFill>
-                <a:latin typeface="Nunito Sans"/>
-              </a:rPr>
-              <a:t>• </a:t>
-            </a:r>
-            <a:r>
-              <a:rPr sz="2800" b="0">
-                <a:solidFill>
-                  <a:srgbClr val="1F2A44"/>
-                </a:solidFill>
-                <a:latin typeface="Nunito Sans"/>
-              </a:rPr>
-              <a:t>Muchas webs ganan dinero con cada clic y cada anuncio</a:t>
-            </a:r>
-          </a:p>
-          <a:p>
-            <a:pPr>
-              <a:spcAft>
-                <a:spcPts val="1260"/>
-              </a:spcAft>
-            </a:pPr>
-            <a:r>
-              <a:rPr sz="2800" b="1">
-                <a:solidFill>
-                  <a:srgbClr val="E8793A"/>
-                </a:solidFill>
-                <a:latin typeface="Nunito Sans"/>
-              </a:rPr>
-              <a:t>• </a:t>
-            </a:r>
-            <a:r>
-              <a:rPr sz="2800" b="0">
-                <a:solidFill>
-                  <a:srgbClr val="1F2A44"/>
-                </a:solidFill>
-                <a:latin typeface="Nunito Sans"/>
-              </a:rPr>
-              <a:t>Promete mucho; la noticia cuenta poco</a:t>
-            </a:r>
-          </a:p>
-          <a:p>
-            <a:pPr>
-              <a:spcAft>
-                <a:spcPts val="1260"/>
-              </a:spcAft>
-            </a:pPr>
-            <a:r>
-              <a:rPr sz="2800" b="1">
-                <a:solidFill>
-                  <a:srgbClr val="E8793A"/>
-                </a:solidFill>
-                <a:latin typeface="Nunito Sans"/>
-              </a:rPr>
-              <a:t>• </a:t>
-            </a:r>
-            <a:r>
-              <a:rPr sz="2800" b="0">
-                <a:solidFill>
-                  <a:srgbClr val="1F2A44"/>
-                </a:solidFill>
-                <a:latin typeface="Nunito Sans"/>
-              </a:rPr>
-              <a:t>Busca curiosidad, miedo o enfado</a:t>
-            </a:r>
-          </a:p>
-        </p:txBody>
-      </p:sp>
+        </p:nvGraphicFramePr>
+        <p:xfrm>
+          <a:off x="640000" y="1700000"/>
+          <a:ext cx="10912000" cy="2400000"/>
+        </p:xfrm>
+        <a:graphic>
+          <a:graphicData uri="http://schemas.openxmlformats.org/drawingml/2006/table">
+            <a:tbl>
+              <a:tblPr firstRow="1" bandRow="1">
+                <a:tableStyleId>{5C22544A-7EE6-4342-B048-85BDC9FD1C3A}</a:tableStyleId>
+              </a:tblPr>
+              <a:tblGrid>
+                <a:gridCol w="5456000"/>
+                <a:gridCol w="5456000"/>
+              </a:tblGrid>
+              <a:tr h="600000">
+                <a:tc>
+                  <a:txBody>
+                    <a:bodyPr/>
+                    <a:lstStyle/>
+                    <a:p>
+                      <a:r>
+                        <a:rPr sz="2000" b="1">
+                          <a:solidFill>
+                            <a:srgbClr val="FBF7EF"/>
+                          </a:solidFill>
+                          <a:latin typeface="Fredoka"/>
+                        </a:rPr>
+                        <a:t>Pregunta</a:t>
+                      </a:r>
+                    </a:p>
+                  </a:txBody>
+                  <a:tcPr>
+                    <a:solidFill>
+                      <a:srgbClr val="1F2A44"/>
+                    </a:solidFill>
+                  </a:tcPr>
+                </a:tc>
+                <a:tc>
+                  <a:txBody>
+                    <a:bodyPr/>
+                    <a:lstStyle/>
+                    <a:p>
+                      <a:r>
+                        <a:rPr sz="2000" b="1">
+                          <a:solidFill>
+                            <a:srgbClr val="FBF7EF"/>
+                          </a:solidFill>
+                          <a:latin typeface="Fredoka"/>
+                        </a:rPr>
+                        <a:t>Qué miro</a:t>
+                      </a:r>
+                    </a:p>
+                  </a:txBody>
+                  <a:tcPr>
+                    <a:solidFill>
+                      <a:srgbClr val="1F2A44"/>
+                    </a:solidFill>
+                  </a:tcPr>
+                </a:tc>
+              </a:tr>
+              <a:tr h="600000">
+                <a:tc>
+                  <a:txBody>
+                    <a:bodyPr/>
+                    <a:lstStyle/>
+                    <a:p>
+                      <a:r>
+                        <a:rPr sz="2000" b="1">
+                          <a:solidFill>
+                            <a:srgbClr val="1F2A44"/>
+                          </a:solidFill>
+                          <a:latin typeface="Nunito Sans"/>
+                        </a:rPr>
+                        <a:t>¿Quién lo dice?</a:t>
+                      </a:r>
+                    </a:p>
+                  </a:txBody>
+                  <a:tcPr>
+                    <a:solidFill>
+                      <a:srgbClr val="FFFFFF"/>
+                    </a:solidFill>
+                  </a:tcPr>
+                </a:tc>
+                <a:tc>
+                  <a:txBody>
+                    <a:bodyPr/>
+                    <a:lstStyle/>
+                    <a:p>
+                      <a:r>
+                        <a:rPr sz="2000" b="0">
+                          <a:solidFill>
+                            <a:srgbClr val="1F2A44"/>
+                          </a:solidFill>
+                          <a:latin typeface="Nunito Sans"/>
+                        </a:rPr>
+                        <a:t>¿Tiene nombre? ¿Sabe del tema?</a:t>
+                      </a:r>
+                    </a:p>
+                  </a:txBody>
+                  <a:tcPr>
+                    <a:solidFill>
+                      <a:srgbClr val="FFFFFF"/>
+                    </a:solidFill>
+                  </a:tcPr>
+                </a:tc>
+              </a:tr>
+              <a:tr h="600000">
+                <a:tc>
+                  <a:txBody>
+                    <a:bodyPr/>
+                    <a:lstStyle/>
+                    <a:p>
+                      <a:r>
+                        <a:rPr sz="2000" b="1">
+                          <a:solidFill>
+                            <a:srgbClr val="1F2A44"/>
+                          </a:solidFill>
+                          <a:latin typeface="Nunito Sans"/>
+                        </a:rPr>
+                        <a:t>¿Cómo lo sabe?</a:t>
+                      </a:r>
+                    </a:p>
+                  </a:txBody>
+                  <a:tcPr>
+                    <a:solidFill>
+                      <a:srgbClr val="EAF0F7"/>
+                    </a:solidFill>
+                  </a:tcPr>
+                </a:tc>
+                <a:tc>
+                  <a:txBody>
+                    <a:bodyPr/>
+                    <a:lstStyle/>
+                    <a:p>
+                      <a:r>
+                        <a:rPr sz="2000" b="0">
+                          <a:solidFill>
+                            <a:srgbClr val="1F2A44"/>
+                          </a:solidFill>
+                          <a:latin typeface="Nunito Sans"/>
+                        </a:rPr>
+                        <a:t>¿Lo vio, lo midió o lo copió?</a:t>
+                      </a:r>
+                    </a:p>
+                  </a:txBody>
+                  <a:tcPr>
+                    <a:solidFill>
+                      <a:srgbClr val="EAF0F7"/>
+                    </a:solidFill>
+                  </a:tcPr>
+                </a:tc>
+              </a:tr>
+              <a:tr h="600000">
+                <a:tc>
+                  <a:txBody>
+                    <a:bodyPr/>
+                    <a:lstStyle/>
+                    <a:p>
+                      <a:r>
+                        <a:rPr sz="2000" b="1">
+                          <a:solidFill>
+                            <a:srgbClr val="1F2A44"/>
+                          </a:solidFill>
+                          <a:latin typeface="Nunito Sans"/>
+                        </a:rPr>
+                        <a:t>¿Qué gana?</a:t>
+                      </a:r>
+                    </a:p>
+                  </a:txBody>
+                  <a:tcPr>
+                    <a:solidFill>
+                      <a:srgbClr val="FFFFFF"/>
+                    </a:solidFill>
+                  </a:tcPr>
+                </a:tc>
+                <a:tc>
+                  <a:txBody>
+                    <a:bodyPr/>
+                    <a:lstStyle/>
+                    <a:p>
+                      <a:r>
+                        <a:rPr sz="2000" b="0">
+                          <a:solidFill>
+                            <a:srgbClr val="1F2A44"/>
+                          </a:solidFill>
+                          <a:latin typeface="Nunito Sans"/>
+                        </a:rPr>
+                        <a:t>¿Dinero, visitas, votos, fama?</a:t>
+                      </a:r>
+                    </a:p>
+                  </a:txBody>
+                  <a:tcPr>
+                    <a:solidFill>
+                      <a:srgbClr val="FFFFFF"/>
+                    </a:solidFill>
+                  </a:tcPr>
+                </a:tc>
+              </a:tr>
+            </a:tbl>
+          </a:graphicData>
+        </a:graphic>
+      </p:graphicFrame>
     </p:spTree>
   </p:cSld>
   <p:clrMapOvr>
@@ -7228,7 +7276,7 @@
                 </a:solidFill>
                 <a:latin typeface="Nunito Sans"/>
               </a:rPr>
-              <a:t>BLOQUE 1 · TITULARES Y CLICKBAIT</a:t>
+              <a:t>BLOQUE 1 · QUÉ ES UNA FUENTE</a:t>
             </a:r>
           </a:p>
         </p:txBody>
@@ -7267,21 +7315,64 @@
                 </a:solidFill>
                 <a:latin typeface="Fredoka"/>
               </a:rPr>
-              <a:t>Cómo reconocer un clickbait</a:t>
-            </a:r>
-          </a:p>
-        </p:txBody>
-      </p:sp>
-      <p:sp>
-        <p:nvSpPr>
-          <p:cNvPr id="4" name="TextBox 3"/>
+              <a:t>Señales de una fuente (pistas, no pruebas)</a:t>
+            </a:r>
+          </a:p>
+        </p:txBody>
+      </p:sp>
+      <p:sp>
+        <p:nvSpPr>
+          <p:cNvPr id="4" name="Rectangle 3"/>
+          <p:cNvSpPr/>
+          <p:nvPr/>
+        </p:nvSpPr>
+        <p:spPr>
+          <a:xfrm>
+            <a:off x="640000" y="1650000"/>
+            <a:ext cx="5306000" cy="4400000"/>
+          </a:xfrm>
+          <a:prstGeom prst="rect">
+            <a:avLst/>
+          </a:prstGeom>
+          <a:solidFill>
+            <a:srgbClr val="FBE3D2"/>
+          </a:solidFill>
+          <a:ln>
+            <a:noFill/>
+          </a:ln>
+        </p:spPr>
+        <p:style>
+          <a:lnRef idx="1">
+            <a:schemeClr val="accent1"/>
+          </a:lnRef>
+          <a:fillRef idx="3">
+            <a:schemeClr val="accent1"/>
+          </a:fillRef>
+          <a:effectRef idx="2">
+            <a:schemeClr val="accent1"/>
+          </a:effectRef>
+          <a:fontRef idx="minor">
+            <a:schemeClr val="lt1"/>
+          </a:fontRef>
+        </p:style>
+        <p:txBody>
+          <a:bodyPr rtlCol="0" anchor="ctr"/>
+          <a:lstStyle/>
+          <a:p>
+            <a:pPr algn="ctr"/>
+          </a:p>
+        </p:txBody>
+      </p:sp>
+      <p:sp>
+        <p:nvSpPr>
+          <p:cNvPr id="5" name="TextBox 4"/>
           <p:cNvSpPr txBox="1"/>
           <p:nvPr/>
         </p:nvSpPr>
         <p:spPr>
           <a:xfrm>
-            <a:off x="840000" y="1730000"/>
-            <a:ext cx="10512000" cy="1000000"/>
+            <a:off x="840000" y="1750000"/>
+            <a:ext cx="4906000" cy="600000"/>
           </a:xfrm>
           <a:prstGeom prst="rect">
             <a:avLst/>
@@ -7289,38 +7380,38 @@
           <a:noFill/>
         </p:spPr>
         <p:txBody>
-          <a:bodyPr wrap="square" anchor="ctr">
+          <a:bodyPr wrap="square">
             <a:spAutoFit/>
           </a:bodyPr>
           <a:lstStyle/>
           <a:p>
             <a:pPr>
               <a:spcAft>
-                <a:spcPts val="1080"/>
-              </a:spcAft>
-            </a:pPr>
-            <a:r>
-              <a:rPr sz="2400" b="0">
-                <a:solidFill>
-                  <a:srgbClr val="1F2A44"/>
-                </a:solidFill>
-                <a:latin typeface="Nunito Sans"/>
-              </a:rPr>
-              <a:t>Son pistas, no pruebas: lo que cuenta es si la noticia da lo que promete.</a:t>
-            </a:r>
-          </a:p>
-        </p:txBody>
-      </p:sp>
-      <p:sp>
-        <p:nvSpPr>
-          <p:cNvPr id="5" name="TextBox 4"/>
+                <a:spcPts val="1260"/>
+              </a:spcAft>
+            </a:pPr>
+            <a:r>
+              <a:rPr sz="2800" b="1">
+                <a:solidFill>
+                  <a:srgbClr val="C2531C"/>
+                </a:solidFill>
+                <a:latin typeface="Nunito Sans"/>
+              </a:rPr>
+              <a:t>Señales de alerta</a:t>
+            </a:r>
+          </a:p>
+        </p:txBody>
+      </p:sp>
+      <p:sp>
+        <p:nvSpPr>
+          <p:cNvPr id="6" name="TextBox 5"/>
           <p:cNvSpPr txBox="1"/>
           <p:nvPr/>
         </p:nvSpPr>
         <p:spPr>
           <a:xfrm>
-            <a:off x="640000" y="3000000"/>
-            <a:ext cx="10912000" cy="3458000"/>
+            <a:off x="840000" y="2400000"/>
+            <a:ext cx="4906000" cy="3500000"/>
           </a:xfrm>
           <a:prstGeom prst="rect">
             <a:avLst/>
@@ -7335,12 +7426,192 @@
           <a:p>
             <a:pPr>
               <a:spcAft>
+                <a:spcPts val="1170"/>
+              </a:spcAft>
+            </a:pPr>
+            <a:r>
+              <a:rPr sz="2600" b="1">
+                <a:solidFill>
+                  <a:srgbClr val="E8793A"/>
+                </a:solidFill>
+                <a:latin typeface="Nunito Sans"/>
+              </a:rPr>
+              <a:t>• </a:t>
+            </a:r>
+            <a:r>
+              <a:rPr sz="2600" b="0">
+                <a:solidFill>
+                  <a:srgbClr val="1F2A44"/>
+                </a:solidFill>
+                <a:latin typeface="Nunito Sans"/>
+              </a:rPr>
+              <a:t>Sin autor ni fecha</a:t>
+            </a:r>
+          </a:p>
+          <a:p>
+            <a:pPr>
+              <a:spcAft>
+                <a:spcPts val="1170"/>
+              </a:spcAft>
+            </a:pPr>
+            <a:r>
+              <a:rPr sz="2600" b="1">
+                <a:solidFill>
+                  <a:srgbClr val="E8793A"/>
+                </a:solidFill>
+                <a:latin typeface="Nunito Sans"/>
+              </a:rPr>
+              <a:t>• </a:t>
+            </a:r>
+            <a:r>
+              <a:rPr sz="2600" b="0">
+                <a:solidFill>
+                  <a:srgbClr val="1F2A44"/>
+                </a:solidFill>
+                <a:latin typeface="Nunito Sans"/>
+              </a:rPr>
+              <a:t>No dice de dónde saca los datos</a:t>
+            </a:r>
+          </a:p>
+          <a:p>
+            <a:pPr>
+              <a:spcAft>
+                <a:spcPts val="1170"/>
+              </a:spcAft>
+            </a:pPr>
+            <a:r>
+              <a:rPr sz="2600" b="1">
+                <a:solidFill>
+                  <a:srgbClr val="E8793A"/>
+                </a:solidFill>
+                <a:latin typeface="Nunito Sans"/>
+              </a:rPr>
+              <a:t>• </a:t>
+            </a:r>
+            <a:r>
+              <a:rPr sz="2600" b="0">
+                <a:solidFill>
+                  <a:srgbClr val="1F2A44"/>
+                </a:solidFill>
+                <a:latin typeface="Nunito Sans"/>
+              </a:rPr>
+              <a:t>Quiere que compres, votes o compartas ya</a:t>
+            </a:r>
+          </a:p>
+        </p:txBody>
+      </p:sp>
+      <p:sp>
+        <p:nvSpPr>
+          <p:cNvPr id="7" name="Rectangle 6"/>
+          <p:cNvSpPr/>
+          <p:nvPr/>
+        </p:nvSpPr>
+        <p:spPr>
+          <a:xfrm>
+            <a:off x="6246000" y="1650000"/>
+            <a:ext cx="5306000" cy="4400000"/>
+          </a:xfrm>
+          <a:prstGeom prst="rect">
+            <a:avLst/>
+          </a:prstGeom>
+          <a:solidFill>
+            <a:srgbClr val="EAF0F7"/>
+          </a:solidFill>
+          <a:ln>
+            <a:noFill/>
+          </a:ln>
+        </p:spPr>
+        <p:style>
+          <a:lnRef idx="1">
+            <a:schemeClr val="accent1"/>
+          </a:lnRef>
+          <a:fillRef idx="3">
+            <a:schemeClr val="accent1"/>
+          </a:fillRef>
+          <a:effectRef idx="2">
+            <a:schemeClr val="accent1"/>
+          </a:effectRef>
+          <a:fontRef idx="minor">
+            <a:schemeClr val="lt1"/>
+          </a:fontRef>
+        </p:style>
+        <p:txBody>
+          <a:bodyPr rtlCol="0" anchor="ctr"/>
+          <a:lstStyle/>
+          <a:p>
+            <a:pPr algn="ctr"/>
+          </a:p>
+        </p:txBody>
+      </p:sp>
+      <p:sp>
+        <p:nvSpPr>
+          <p:cNvPr id="8" name="TextBox 7"/>
+          <p:cNvSpPr txBox="1"/>
+          <p:nvPr/>
+        </p:nvSpPr>
+        <p:spPr>
+          <a:xfrm>
+            <a:off x="6446000" y="1750000"/>
+            <a:ext cx="4906000" cy="600000"/>
+          </a:xfrm>
+          <a:prstGeom prst="rect">
+            <a:avLst/>
+          </a:prstGeom>
+          <a:noFill/>
+        </p:spPr>
+        <p:txBody>
+          <a:bodyPr wrap="square">
+            <a:spAutoFit/>
+          </a:bodyPr>
+          <a:lstStyle/>
+          <a:p>
+            <a:pPr>
+              <a:spcAft>
                 <a:spcPts val="1260"/>
               </a:spcAft>
             </a:pPr>
             <a:r>
               <a:rPr sz="2800" b="1">
                 <a:solidFill>
+                  <a:srgbClr val="2F6FB5"/>
+                </a:solidFill>
+                <a:latin typeface="Nunito Sans"/>
+              </a:rPr>
+              <a:t>Señales a favor</a:t>
+            </a:r>
+          </a:p>
+        </p:txBody>
+      </p:sp>
+      <p:sp>
+        <p:nvSpPr>
+          <p:cNvPr id="9" name="TextBox 8"/>
+          <p:cNvSpPr txBox="1"/>
+          <p:nvPr/>
+        </p:nvSpPr>
+        <p:spPr>
+          <a:xfrm>
+            <a:off x="6446000" y="2400000"/>
+            <a:ext cx="4906000" cy="3500000"/>
+          </a:xfrm>
+          <a:prstGeom prst="rect">
+            <a:avLst/>
+          </a:prstGeom>
+          <a:noFill/>
+        </p:spPr>
+        <p:txBody>
+          <a:bodyPr wrap="square">
+            <a:spAutoFit/>
+          </a:bodyPr>
+          <a:lstStyle/>
+          <a:p>
+            <a:pPr>
+              <a:spcAft>
+                <a:spcPts val="1170"/>
+              </a:spcAft>
+            </a:pPr>
+            <a:r>
+              <a:rPr sz="2600" b="1">
+                <a:solidFill>
                   <a:srgbClr val="E8793A"/>
                 </a:solidFill>
                 <a:latin typeface="Nunito Sans"/>
@@ -7348,32 +7619,48 @@
               <a:t>• </a:t>
             </a:r>
             <a:r>
-              <a:rPr sz="2800" b="1">
+              <a:rPr sz="2600" b="0">
                 <a:solidFill>
                   <a:srgbClr val="1F2A44"/>
                 </a:solidFill>
                 <a:latin typeface="Nunito Sans"/>
               </a:rPr>
-              <a:t>Esconde el dato:</a:t>
-            </a:r>
-            <a:r>
-              <a:rPr sz="2800" b="0">
+              <a:t>Autor con nombre y oficio</a:t>
+            </a:r>
+          </a:p>
+          <a:p>
+            <a:pPr>
+              <a:spcAft>
+                <a:spcPts val="1170"/>
+              </a:spcAft>
+            </a:pPr>
+            <a:r>
+              <a:rPr sz="2600" b="1">
+                <a:solidFill>
+                  <a:srgbClr val="E8793A"/>
+                </a:solidFill>
+                <a:latin typeface="Nunito Sans"/>
+              </a:rPr>
+              <a:t>• </a:t>
+            </a:r>
+            <a:r>
+              <a:rPr sz="2600" b="0">
                 <a:solidFill>
                   <a:srgbClr val="1F2A44"/>
                 </a:solidFill>
                 <a:latin typeface="Nunito Sans"/>
               </a:rPr>
-              <a:t> «No creerás lo que pasó»</a:t>
-            </a:r>
-          </a:p>
-          <a:p>
-            <a:pPr>
-              <a:spcAft>
-                <a:spcPts val="1260"/>
-              </a:spcAft>
-            </a:pPr>
-            <a:r>
-              <a:rPr sz="2800" b="1">
+              <a:t>Enlaza a sus fuentes</a:t>
+            </a:r>
+          </a:p>
+          <a:p>
+            <a:pPr>
+              <a:spcAft>
+                <a:spcPts val="1170"/>
+              </a:spcAft>
+            </a:pPr>
+            <a:r>
+              <a:rPr sz="2600" b="1">
                 <a:solidFill>
                   <a:srgbClr val="E8793A"/>
                 </a:solidFill>
@@ -7382,124 +7669,38 @@
               <a:t>• </a:t>
             </a:r>
             <a:r>
-              <a:rPr sz="2800" b="1">
+              <a:rPr sz="2600" b="0">
                 <a:solidFill>
                   <a:srgbClr val="1F2A44"/>
                 </a:solidFill>
                 <a:latin typeface="Nunito Sans"/>
               </a:rPr>
-              <a:t>Exagera:</a:t>
-            </a:r>
-            <a:r>
-              <a:rPr sz="2800" b="0">
+              <a:t>Ha acertado otras veces en ese tema</a:t>
+            </a:r>
+          </a:p>
+          <a:p>
+            <a:pPr>
+              <a:spcAft>
+                <a:spcPts val="1170"/>
+              </a:spcAft>
+            </a:pPr>
+            <a:r>
+              <a:rPr sz="2600" b="1">
+                <a:solidFill>
+                  <a:srgbClr val="E8793A"/>
+                </a:solidFill>
+                <a:latin typeface="Nunito Sans"/>
+              </a:rPr>
+              <a:t>• </a:t>
+            </a:r>
+            <a:r>
+              <a:rPr sz="2600" b="0">
                 <a:solidFill>
                   <a:srgbClr val="1F2A44"/>
                 </a:solidFill>
                 <a:latin typeface="Nunito Sans"/>
               </a:rPr>
-              <a:t> «increíble», «brutal», «impactante»</a:t>
-            </a:r>
-          </a:p>
-          <a:p>
-            <a:pPr>
-              <a:spcAft>
-                <a:spcPts val="1260"/>
-              </a:spcAft>
-            </a:pPr>
-            <a:r>
-              <a:rPr sz="2800" b="1">
-                <a:solidFill>
-                  <a:srgbClr val="E8793A"/>
-                </a:solidFill>
-                <a:latin typeface="Nunito Sans"/>
-              </a:rPr>
-              <a:t>• </a:t>
-            </a:r>
-            <a:r>
-              <a:rPr sz="2800" b="1">
-                <a:solidFill>
-                  <a:srgbClr val="1F2A44"/>
-                </a:solidFill>
-                <a:latin typeface="Nunito Sans"/>
-              </a:rPr>
-              <a:t>MAYÚSCULAS</a:t>
-            </a:r>
-            <a:r>
-              <a:rPr sz="2800" b="0">
-                <a:solidFill>
-                  <a:srgbClr val="1F2A44"/>
-                </a:solidFill>
-                <a:latin typeface="Nunito Sans"/>
-              </a:rPr>
-              <a:t> y muchos signos de exclamación</a:t>
-            </a:r>
-          </a:p>
-          <a:p>
-            <a:pPr>
-              <a:spcAft>
-                <a:spcPts val="1260"/>
-              </a:spcAft>
-            </a:pPr>
-            <a:r>
-              <a:rPr sz="2800" b="1">
-                <a:solidFill>
-                  <a:srgbClr val="E8793A"/>
-                </a:solidFill>
-                <a:latin typeface="Nunito Sans"/>
-              </a:rPr>
-              <a:t>• </a:t>
-            </a:r>
-            <a:r>
-              <a:rPr sz="2800" b="1">
-                <a:solidFill>
-                  <a:srgbClr val="1F2A44"/>
-                </a:solidFill>
-                <a:latin typeface="Nunito Sans"/>
-              </a:rPr>
-              <a:t>Promete un secreto:</a:t>
-            </a:r>
-            <a:r>
-              <a:rPr sz="2800" b="0">
-                <a:solidFill>
-                  <a:srgbClr val="1F2A44"/>
-                </a:solidFill>
-                <a:latin typeface="Nunito Sans"/>
-              </a:rPr>
-              <a:t> «lo que nadie te cuenta»</a:t>
-            </a:r>
-          </a:p>
-          <a:p>
-            <a:pPr>
-              <a:spcAft>
-                <a:spcPts val="1260"/>
-              </a:spcAft>
-            </a:pPr>
-            <a:r>
-              <a:rPr sz="2800" b="1">
-                <a:solidFill>
-                  <a:srgbClr val="E8793A"/>
-                </a:solidFill>
-                <a:latin typeface="Nunito Sans"/>
-              </a:rPr>
-              <a:t>• </a:t>
-            </a:r>
-            <a:r>
-              <a:rPr sz="2800" b="1">
-                <a:solidFill>
-                  <a:srgbClr val="1F2A44"/>
-                </a:solidFill>
-                <a:latin typeface="Nunito Sans"/>
-              </a:rPr>
-              <a:t>Hace una pregunta</a:t>
-            </a:r>
-            <a:r>
-              <a:rPr sz="2800" b="0">
-                <a:solidFill>
-                  <a:srgbClr val="1F2A44"/>
-                </a:solidFill>
-                <a:latin typeface="Nunito Sans"/>
-              </a:rPr>
-              <a:t> que la noticia contesta con un «no»</a:t>
+              <a:t>Corrige sus errores en público</a:t>
             </a:r>
           </a:p>
         </p:txBody>
